--- a/B_13.pptx
+++ b/B_13.pptx
@@ -130,6 +130,43 @@
 </p:presentation>
 </file>
 
+<file path=ppt/revisionInfo.xml><?xml version="1.0" encoding="utf-8"?>
+<p1510:revInfo xmlns:a="http://schemas.openxmlformats.org/drawingml/2006/main" xmlns:r="http://schemas.openxmlformats.org/officeDocument/2006/relationships" xmlns:p1510="http://schemas.microsoft.com/office/powerpoint/2015/10/main">
+  <p1510:revLst>
+    <p1510:client id="{875FFCEA-DA8E-4F19-A329-EFEC0320132A}" v="1" dt="2026-04-16T09:21:24.753"/>
+  </p1510:revLst>
+</p1510:revInfo>
+</file>
+
+<file path=ppt/changesInfos/changesInfo1.xml><?xml version="1.0" encoding="utf-8"?>
+<pc:chgInfo xmlns:a="http://schemas.openxmlformats.org/drawingml/2006/main" xmlns:r="http://schemas.openxmlformats.org/officeDocument/2006/relationships" xmlns:ac="http://schemas.microsoft.com/office/drawing/2013/main/command" xmlns:pc="http://schemas.microsoft.com/office/powerpoint/2013/main/command">
+  <pc:docChgLst>
+    <pc:chgData name="saikumar kolli" userId="fd3dac78d918ae05" providerId="LiveId" clId="{26000817-8981-45BE-98B6-78093769269E}"/>
+    <pc:docChg chg="modSld">
+      <pc:chgData name="saikumar kolli" userId="fd3dac78d918ae05" providerId="LiveId" clId="{26000817-8981-45BE-98B6-78093769269E}" dt="2026-04-16T09:21:30.342" v="2" actId="2711"/>
+      <pc:docMkLst>
+        <pc:docMk/>
+      </pc:docMkLst>
+      <pc:sldChg chg="modSp mod">
+        <pc:chgData name="saikumar kolli" userId="fd3dac78d918ae05" providerId="LiveId" clId="{26000817-8981-45BE-98B6-78093769269E}" dt="2026-04-16T09:21:30.342" v="2" actId="2711"/>
+        <pc:sldMkLst>
+          <pc:docMk/>
+          <pc:sldMk cId="312851990" sldId="257"/>
+        </pc:sldMkLst>
+        <pc:spChg chg="mod">
+          <ac:chgData name="saikumar kolli" userId="fd3dac78d918ae05" providerId="LiveId" clId="{26000817-8981-45BE-98B6-78093769269E}" dt="2026-04-16T09:21:30.342" v="2" actId="2711"/>
+          <ac:spMkLst>
+            <pc:docMk/>
+            <pc:sldMk cId="312851990" sldId="257"/>
+            <ac:spMk id="2" creationId="{8609769F-E01D-C7C2-2CE6-5E3351FABA87}"/>
+          </ac:spMkLst>
+        </pc:spChg>
+      </pc:sldChg>
+    </pc:docChg>
+  </pc:docChgLst>
+</pc:chgInfo>
+</file>
+
 <file path=ppt/slideLayouts/slideLayout1.xml><?xml version="1.0" encoding="utf-8"?>
 <p:sldLayout xmlns:a="http://schemas.openxmlformats.org/drawingml/2006/main" xmlns:r="http://schemas.openxmlformats.org/officeDocument/2006/relationships" xmlns:p="http://schemas.openxmlformats.org/presentationml/2006/main" type="title" preserve="1">
   <p:cSld name="Title Slide">
@@ -279,7 +316,7 @@
           <a:p>
             <a:fld id="{6C866AE2-FEF7-4940-8BE9-79E2636F9CEB}" type="datetimeFigureOut">
               <a:rPr lang="en-IN" smtClean="0"/>
-              <a:t>15-04-2026</a:t>
+              <a:t>16-04-2026</a:t>
             </a:fld>
             <a:endParaRPr lang="en-IN"/>
           </a:p>
@@ -479,7 +516,7 @@
           <a:p>
             <a:fld id="{6C866AE2-FEF7-4940-8BE9-79E2636F9CEB}" type="datetimeFigureOut">
               <a:rPr lang="en-IN" smtClean="0"/>
-              <a:t>15-04-2026</a:t>
+              <a:t>16-04-2026</a:t>
             </a:fld>
             <a:endParaRPr lang="en-IN"/>
           </a:p>
@@ -689,7 +726,7 @@
           <a:p>
             <a:fld id="{6C866AE2-FEF7-4940-8BE9-79E2636F9CEB}" type="datetimeFigureOut">
               <a:rPr lang="en-IN" smtClean="0"/>
-              <a:t>15-04-2026</a:t>
+              <a:t>16-04-2026</a:t>
             </a:fld>
             <a:endParaRPr lang="en-IN"/>
           </a:p>
@@ -889,7 +926,7 @@
           <a:p>
             <a:fld id="{6C866AE2-FEF7-4940-8BE9-79E2636F9CEB}" type="datetimeFigureOut">
               <a:rPr lang="en-IN" smtClean="0"/>
-              <a:t>15-04-2026</a:t>
+              <a:t>16-04-2026</a:t>
             </a:fld>
             <a:endParaRPr lang="en-IN"/>
           </a:p>
@@ -1165,7 +1202,7 @@
           <a:p>
             <a:fld id="{6C866AE2-FEF7-4940-8BE9-79E2636F9CEB}" type="datetimeFigureOut">
               <a:rPr lang="en-IN" smtClean="0"/>
-              <a:t>15-04-2026</a:t>
+              <a:t>16-04-2026</a:t>
             </a:fld>
             <a:endParaRPr lang="en-IN"/>
           </a:p>
@@ -1433,7 +1470,7 @@
           <a:p>
             <a:fld id="{6C866AE2-FEF7-4940-8BE9-79E2636F9CEB}" type="datetimeFigureOut">
               <a:rPr lang="en-IN" smtClean="0"/>
-              <a:t>15-04-2026</a:t>
+              <a:t>16-04-2026</a:t>
             </a:fld>
             <a:endParaRPr lang="en-IN"/>
           </a:p>
@@ -1848,7 +1885,7 @@
           <a:p>
             <a:fld id="{6C866AE2-FEF7-4940-8BE9-79E2636F9CEB}" type="datetimeFigureOut">
               <a:rPr lang="en-IN" smtClean="0"/>
-              <a:t>15-04-2026</a:t>
+              <a:t>16-04-2026</a:t>
             </a:fld>
             <a:endParaRPr lang="en-IN"/>
           </a:p>
@@ -1990,7 +2027,7 @@
           <a:p>
             <a:fld id="{6C866AE2-FEF7-4940-8BE9-79E2636F9CEB}" type="datetimeFigureOut">
               <a:rPr lang="en-IN" smtClean="0"/>
-              <a:t>15-04-2026</a:t>
+              <a:t>16-04-2026</a:t>
             </a:fld>
             <a:endParaRPr lang="en-IN"/>
           </a:p>
@@ -2103,7 +2140,7 @@
           <a:p>
             <a:fld id="{6C866AE2-FEF7-4940-8BE9-79E2636F9CEB}" type="datetimeFigureOut">
               <a:rPr lang="en-IN" smtClean="0"/>
-              <a:t>15-04-2026</a:t>
+              <a:t>16-04-2026</a:t>
             </a:fld>
             <a:endParaRPr lang="en-IN"/>
           </a:p>
@@ -2416,7 +2453,7 @@
           <a:p>
             <a:fld id="{6C866AE2-FEF7-4940-8BE9-79E2636F9CEB}" type="datetimeFigureOut">
               <a:rPr lang="en-IN" smtClean="0"/>
-              <a:t>15-04-2026</a:t>
+              <a:t>16-04-2026</a:t>
             </a:fld>
             <a:endParaRPr lang="en-IN"/>
           </a:p>
@@ -2705,7 +2742,7 @@
           <a:p>
             <a:fld id="{6C866AE2-FEF7-4940-8BE9-79E2636F9CEB}" type="datetimeFigureOut">
               <a:rPr lang="en-IN" smtClean="0"/>
-              <a:t>15-04-2026</a:t>
+              <a:t>16-04-2026</a:t>
             </a:fld>
             <a:endParaRPr lang="en-IN"/>
           </a:p>
@@ -2948,7 +2985,7 @@
           <a:p>
             <a:fld id="{6C866AE2-FEF7-4940-8BE9-79E2636F9CEB}" type="datetimeFigureOut">
               <a:rPr lang="en-IN" smtClean="0"/>
-              <a:t>15-04-2026</a:t>
+              <a:t>16-04-2026</a:t>
             </a:fld>
             <a:endParaRPr lang="en-IN"/>
           </a:p>
@@ -3414,20 +3451,16 @@
           <a:p>
             <a:pPr algn="ctr"/>
             <a:r>
-              <a:rPr lang="en-US" sz="3500" b="1" dirty="0">
-                <a:latin typeface="+mn-lt"/>
+              <a:rPr lang="en-US" sz="3600" b="1" dirty="0">
+                <a:latin typeface="Times New Roman" panose="02020603050405020304" pitchFamily="18" charset="0"/>
+                <a:cs typeface="Times New Roman" panose="02020603050405020304" pitchFamily="18" charset="0"/>
               </a:rPr>
-              <a:t>A Feature Fusion and Classification Framework for </a:t>
-            </a:r>
-          </a:p>
-          <a:p>
-            <a:pPr algn="ctr"/>
-            <a:r>
-              <a:rPr lang="en-US" sz="3500" b="1" dirty="0">
-                <a:latin typeface="+mn-lt"/>
-              </a:rPr>
-              <a:t>Bi-Temporal Hyperspectral Image Change Detection</a:t>
-            </a:r>
+              <a:t>A Siamese Deep Learning Framework for Bi-Temporal Hyperspectral Image Change Detection</a:t>
+            </a:r>
+            <a:endParaRPr lang="en-US" sz="3500" b="1" dirty="0">
+              <a:latin typeface="Times New Roman" panose="02020603050405020304" pitchFamily="18" charset="0"/>
+              <a:cs typeface="Times New Roman" panose="02020603050405020304" pitchFamily="18" charset="0"/>
+            </a:endParaRPr>
           </a:p>
         </p:txBody>
       </p:sp>
@@ -4021,7 +4054,7 @@
             <a:fld id="{12D83BDF-1171-4B6E-B360-F8FAFB0EEC24}" type="datetime3">
               <a:rPr lang="en-US" smtClean="0"/>
               <a:pPr/>
-              <a:t>15 April 2026</a:t>
+              <a:t>16 April 2026</a:t>
             </a:fld>
             <a:endParaRPr lang="en-US" dirty="0"/>
           </a:p>
@@ -4127,8 +4160,8 @@
           </a:p>
         </p:txBody>
       </p:sp>
-      <mc:AlternateContent xmlns:mc="http://schemas.openxmlformats.org/markup-compatibility/2006">
-        <mc:Choice xmlns:a14="http://schemas.microsoft.com/office/drawing/2010/main" Requires="a14">
+      <mc:AlternateContent xmlns:mc="http://schemas.openxmlformats.org/markup-compatibility/2006" xmlns:a14="http://schemas.microsoft.com/office/drawing/2010/main">
+        <mc:Choice Requires="a14">
           <p:sp>
             <p:nvSpPr>
               <p:cNvPr id="5" name="TextBox 4">
@@ -4618,7 +4651,7 @@
             </p:txBody>
           </p:sp>
         </mc:Choice>
-        <mc:Fallback>
+        <mc:Fallback xmlns="">
           <p:sp>
             <p:nvSpPr>
               <p:cNvPr id="5" name="TextBox 4">
@@ -4763,8 +4796,8 @@
           </a:p>
         </p:txBody>
       </p:sp>
-      <mc:AlternateContent xmlns:mc="http://schemas.openxmlformats.org/markup-compatibility/2006">
-        <mc:Choice xmlns:a14="http://schemas.microsoft.com/office/drawing/2010/main" Requires="a14">
+      <mc:AlternateContent xmlns:mc="http://schemas.openxmlformats.org/markup-compatibility/2006" xmlns:a14="http://schemas.microsoft.com/office/drawing/2010/main">
+        <mc:Choice Requires="a14">
           <p:sp>
             <p:nvSpPr>
               <p:cNvPr id="7" name="TextBox 6">
@@ -5291,7 +5324,7 @@
             </p:txBody>
           </p:sp>
         </mc:Choice>
-        <mc:Fallback>
+        <mc:Fallback xmlns="">
           <p:sp>
             <p:nvSpPr>
               <p:cNvPr id="7" name="TextBox 6">
@@ -12210,8 +12243,8 @@
           </a:p>
         </p:txBody>
       </p:sp>
-      <mc:AlternateContent xmlns:mc="http://schemas.openxmlformats.org/markup-compatibility/2006">
-        <mc:Choice xmlns:a14="http://schemas.microsoft.com/office/drawing/2010/main" Requires="a14">
+      <mc:AlternateContent xmlns:mc="http://schemas.openxmlformats.org/markup-compatibility/2006" xmlns:a14="http://schemas.microsoft.com/office/drawing/2010/main">
+        <mc:Choice Requires="a14">
           <p:sp>
             <p:nvSpPr>
               <p:cNvPr id="5" name="TextBox 4">
@@ -12562,7 +12595,7 @@
             </p:txBody>
           </p:sp>
         </mc:Choice>
-        <mc:Fallback>
+        <mc:Fallback xmlns="">
           <p:sp>
             <p:nvSpPr>
               <p:cNvPr id="5" name="TextBox 4">
